--- a/1차 미니프로젝트/아이데이션/(AI트랙) 조별 과제 1P_10반 22조.pptx
+++ b/1차 미니프로젝트/아이데이션/(AI트랙) 조별 과제 1P_10반 22조.pptx
@@ -4885,7 +4885,7 @@
           <p:nvPr>
             <p:extLst>
               <p:ext uri="{D42A27DB-BD31-4B8C-83A1-F6EECF244321}">
-                <p14:modId xmlns:p14="http://schemas.microsoft.com/office/powerpoint/2010/main" val="583123579"/>
+                <p14:modId xmlns:p14="http://schemas.microsoft.com/office/powerpoint/2010/main" val="211939346"/>
               </p:ext>
             </p:extLst>
           </p:nvPr>
@@ -6147,7 +6147,7 @@
                         <a:defRPr/>
                       </a:pPr>
                       <a:r>
-                        <a:rPr lang="en-US" altLang="ko-KR" sz="1200" b="1" i="0" u="none" strike="noStrike">
+                        <a:rPr lang="en-US" altLang="ko-KR" sz="1200" b="1" i="0" u="none" strike="noStrike" dirty="0">
                           <a:solidFill>
                             <a:srgbClr val="000000"/>
                           </a:solidFill>
@@ -6157,7 +6157,7 @@
                         <a:t>2022 </a:t>
                       </a:r>
                       <a:r>
-                        <a:rPr lang="ko-KR" altLang="en-US" sz="1200" b="1" i="0" u="none" strike="noStrike">
+                        <a:rPr lang="ko-KR" altLang="en-US" sz="1200" b="1" i="0" u="none" strike="noStrike" dirty="0">
                           <a:solidFill>
                             <a:srgbClr val="000000"/>
                           </a:solidFill>
@@ -6167,7 +6167,7 @@
                         <a:t>중대재해처벌법 시행으로 경영 책임자에게 </a:t>
                       </a:r>
                       <a:r>
-                        <a:rPr lang="en-US" altLang="ko-KR" sz="1200" b="1" i="0" u="none" strike="noStrike">
+                        <a:rPr lang="en-US" altLang="ko-KR" sz="1200" b="1" i="0" u="none" strike="noStrike" dirty="0">
                           <a:solidFill>
                             <a:srgbClr val="000000"/>
                           </a:solidFill>
@@ -6177,7 +6177,7 @@
                         <a:t>‘</a:t>
                       </a:r>
                       <a:r>
-                        <a:rPr lang="ko-KR" altLang="en-US" sz="1200" b="1" i="0" u="none" strike="noStrike">
+                        <a:rPr lang="ko-KR" altLang="en-US" sz="1200" b="1" i="0" u="none" strike="noStrike" dirty="0">
                           <a:solidFill>
                             <a:srgbClr val="000000"/>
                           </a:solidFill>
@@ -6187,7 +6187,27 @@
                         <a:t>사전적 위험 파악 및 개선 의무가 법적으로 강제됨에 따라</a:t>
                       </a:r>
                       <a:r>
-                        <a:rPr lang="en-US" altLang="ko-KR" sz="1200" b="1" i="0" u="none" strike="noStrike">
+                        <a:rPr lang="en-US" altLang="ko-KR" sz="1200" b="1" i="0" u="none" strike="noStrike" dirty="0">
+                          <a:solidFill>
+                            <a:srgbClr val="000000"/>
+                          </a:solidFill>
+                          <a:latin typeface="맑은 고딕"/>
+                          <a:ea typeface="맑은 고딕"/>
+                        </a:rPr>
+                        <a:t>, </a:t>
+                      </a:r>
+                      <a:r>
+                        <a:rPr lang="ko-KR" altLang="en-US" sz="1200" b="1" i="0" u="none" strike="noStrike" dirty="0">
+                          <a:solidFill>
+                            <a:srgbClr val="000000"/>
+                          </a:solidFill>
+                          <a:latin typeface="맑은 고딕"/>
+                          <a:ea typeface="맑은 고딕"/>
+                        </a:rPr>
+                        <a:t>기업은 사고를 사전에 예방하고 발생 시 즉시 감지</a:t>
+                      </a:r>
+                      <a:r>
+                        <a:rPr lang="en-US" altLang="ko-KR" sz="1200" b="1" i="0" u="none" strike="noStrike" dirty="0">
                           <a:solidFill>
                             <a:srgbClr val="000000"/>
                           </a:solidFill>
@@ -6204,29 +6224,9 @@
                           <a:latin typeface="맑은 고딕"/>
                           <a:ea typeface="맑은 고딕"/>
                         </a:rPr>
-                        <a:t>기업은 사고를 사전에 예방하고 발생 시 즉시 감지</a:t>
+                        <a:t>대응하여 피해를 최소화 할 필요가 있음</a:t>
                       </a:r>
-                      <a:r>
-                        <a:rPr lang="en-US" altLang="ko-KR" sz="1200" b="1" i="0" u="none" strike="noStrike">
-                          <a:solidFill>
-                            <a:srgbClr val="000000"/>
-                          </a:solidFill>
-                          <a:latin typeface="맑은 고딕"/>
-                          <a:ea typeface="맑은 고딕"/>
-                        </a:rPr>
-                        <a:t>, </a:t>
-                      </a:r>
-                      <a:r>
-                        <a:rPr lang="ko-KR" altLang="en-US" sz="1200" b="1" i="0" u="none" strike="noStrike">
-                          <a:solidFill>
-                            <a:srgbClr val="000000"/>
-                          </a:solidFill>
-                          <a:latin typeface="맑은 고딕"/>
-                          <a:ea typeface="맑은 고딕"/>
-                        </a:rPr>
-                        <a:t>대응하여 피를 최소화 할 필요가 있음</a:t>
-                      </a:r>
-                      <a:endParaRPr lang="en-US" altLang="ko-KR" sz="1200" b="1" i="0" u="none" strike="noStrike">
+                      <a:endParaRPr lang="en-US" altLang="ko-KR" sz="1200" b="1" i="0" u="none" strike="noStrike" dirty="0">
                         <a:solidFill>
                           <a:srgbClr val="000000"/>
                         </a:solidFill>
@@ -6249,7 +6249,7 @@
                         <a:defRPr/>
                       </a:pPr>
                       <a:r>
-                        <a:rPr lang="en-US" altLang="ko-KR" sz="800" b="1" i="0" u="none" strike="noStrike" cap="none">
+                        <a:rPr lang="en-US" altLang="ko-KR" sz="800" b="1" i="0" u="none" strike="noStrike" cap="none" dirty="0">
                           <a:solidFill>
                             <a:srgbClr val="000000"/>
                           </a:solidFill>
@@ -6265,7 +6265,7 @@
                         <a:defRPr/>
                       </a:pPr>
                       <a:r>
-                        <a:rPr lang="ko-KR" altLang="en-US" sz="1200" b="1" i="0" u="none" strike="noStrike">
+                        <a:rPr lang="ko-KR" altLang="en-US" sz="1200" b="1" i="0" u="none" strike="noStrike" dirty="0">
                           <a:solidFill>
                             <a:srgbClr val="000000"/>
                           </a:solidFill>
@@ -6879,7 +6879,7 @@
     <mc:Choice Requires="p14">
       <p:transition/>
     </mc:Choice>
-    <mc:Fallback xmlns="" xmlns:c="http://schemas.openxmlformats.org/drawingml/2006/chart" xmlns:dgm="http://schemas.openxmlformats.org/drawingml/2006/diagram" xmlns:dsp="http://schemas.microsoft.com/office/drawing/2008/diagram">
+    <mc:Fallback xmlns:dsp="http://schemas.microsoft.com/office/drawing/2008/diagram" xmlns:dgm="http://schemas.openxmlformats.org/drawingml/2006/diagram" xmlns:c="http://schemas.openxmlformats.org/drawingml/2006/chart" xmlns="">
       <p:transition/>
     </mc:Fallback>
   </mc:AlternateContent>
